--- a/report/weather_forecasting_presentation.pptx
+++ b/report/weather_forecasting_presentation.pptx
@@ -5,27 +5,28 @@
     <p:sldMasterId id="2147483677" r:id="rId1"/>
   </p:sldMasterIdLst>
   <p:notesMasterIdLst>
-    <p:notesMasterId r:id="rId20"/>
+    <p:notesMasterId r:id="rId21"/>
   </p:notesMasterIdLst>
   <p:sldIdLst>
     <p:sldId id="256" r:id="rId2"/>
-    <p:sldId id="257" r:id="rId3"/>
-    <p:sldId id="258" r:id="rId4"/>
-    <p:sldId id="259" r:id="rId5"/>
-    <p:sldId id="260" r:id="rId6"/>
-    <p:sldId id="261" r:id="rId7"/>
-    <p:sldId id="262" r:id="rId8"/>
-    <p:sldId id="263" r:id="rId9"/>
-    <p:sldId id="264" r:id="rId10"/>
-    <p:sldId id="265" r:id="rId11"/>
-    <p:sldId id="266" r:id="rId12"/>
-    <p:sldId id="267" r:id="rId13"/>
-    <p:sldId id="268" r:id="rId14"/>
-    <p:sldId id="269" r:id="rId15"/>
-    <p:sldId id="270" r:id="rId16"/>
-    <p:sldId id="271" r:id="rId17"/>
-    <p:sldId id="272" r:id="rId18"/>
-    <p:sldId id="274" r:id="rId19"/>
+    <p:sldId id="275" r:id="rId3"/>
+    <p:sldId id="257" r:id="rId4"/>
+    <p:sldId id="258" r:id="rId5"/>
+    <p:sldId id="259" r:id="rId6"/>
+    <p:sldId id="260" r:id="rId7"/>
+    <p:sldId id="261" r:id="rId8"/>
+    <p:sldId id="262" r:id="rId9"/>
+    <p:sldId id="263" r:id="rId10"/>
+    <p:sldId id="264" r:id="rId11"/>
+    <p:sldId id="265" r:id="rId12"/>
+    <p:sldId id="266" r:id="rId13"/>
+    <p:sldId id="267" r:id="rId14"/>
+    <p:sldId id="268" r:id="rId15"/>
+    <p:sldId id="269" r:id="rId16"/>
+    <p:sldId id="270" r:id="rId17"/>
+    <p:sldId id="271" r:id="rId18"/>
+    <p:sldId id="272" r:id="rId19"/>
+    <p:sldId id="274" r:id="rId20"/>
   </p:sldIdLst>
   <p:sldSz cx="12192000" cy="6858000"/>
   <p:notesSz cx="6858000" cy="9144000"/>
@@ -6872,7 +6873,7 @@
           <a:p>
             <a:fld id="{A1EEBD41-7000-4D87-9966-235C411B375D}" type="slidenum">
               <a:rPr lang="en-IN" smtClean="0"/>
-              <a:t>2</a:t>
+              <a:t>3</a:t>
             </a:fld>
             <a:endParaRPr lang="en-IN"/>
           </a:p>
@@ -7694,13 +7695,13 @@
   <p:clrMapOvr>
     <a:masterClrMapping/>
   </p:clrMapOvr>
-  <mc:AlternateContent xmlns:mc="http://schemas.openxmlformats.org/markup-compatibility/2006">
-    <mc:Choice xmlns:p14="http://schemas.microsoft.com/office/powerpoint/2010/main" Requires="p14">
+  <mc:AlternateContent xmlns:mc="http://schemas.openxmlformats.org/markup-compatibility/2006" xmlns:p14="http://schemas.microsoft.com/office/powerpoint/2010/main">
+    <mc:Choice Requires="p14">
       <p:transition p14:dur="250">
         <p14:reveal/>
       </p:transition>
     </mc:Choice>
-    <mc:Fallback>
+    <mc:Fallback xmlns="">
       <p:transition>
         <p:fade/>
       </p:transition>
@@ -7957,13 +7958,13 @@
   <p:clrMapOvr>
     <a:masterClrMapping/>
   </p:clrMapOvr>
-  <mc:AlternateContent xmlns:mc="http://schemas.openxmlformats.org/markup-compatibility/2006">
-    <mc:Choice xmlns:p14="http://schemas.microsoft.com/office/powerpoint/2010/main" Requires="p14">
+  <mc:AlternateContent xmlns:mc="http://schemas.openxmlformats.org/markup-compatibility/2006" xmlns:p14="http://schemas.microsoft.com/office/powerpoint/2010/main">
+    <mc:Choice Requires="p14">
       <p:transition p14:dur="250">
         <p14:reveal/>
       </p:transition>
     </mc:Choice>
-    <mc:Fallback>
+    <mc:Fallback xmlns="">
       <p:transition>
         <p:fade/>
       </p:transition>
@@ -8365,13 +8366,13 @@
   <p:clrMapOvr>
     <a:masterClrMapping/>
   </p:clrMapOvr>
-  <mc:AlternateContent xmlns:mc="http://schemas.openxmlformats.org/markup-compatibility/2006">
-    <mc:Choice xmlns:p14="http://schemas.microsoft.com/office/powerpoint/2010/main" Requires="p14">
+  <mc:AlternateContent xmlns:mc="http://schemas.openxmlformats.org/markup-compatibility/2006" xmlns:p14="http://schemas.microsoft.com/office/powerpoint/2010/main">
+    <mc:Choice Requires="p14">
       <p:transition p14:dur="250">
         <p14:reveal/>
       </p:transition>
     </mc:Choice>
-    <mc:Fallback>
+    <mc:Fallback xmlns="">
       <p:transition>
         <p:fade/>
       </p:transition>
@@ -8628,13 +8629,13 @@
   <p:clrMapOvr>
     <a:masterClrMapping/>
   </p:clrMapOvr>
-  <mc:AlternateContent xmlns:mc="http://schemas.openxmlformats.org/markup-compatibility/2006">
-    <mc:Choice xmlns:p14="http://schemas.microsoft.com/office/powerpoint/2010/main" Requires="p14">
+  <mc:AlternateContent xmlns:mc="http://schemas.openxmlformats.org/markup-compatibility/2006" xmlns:p14="http://schemas.microsoft.com/office/powerpoint/2010/main">
+    <mc:Choice Requires="p14">
       <p:transition p14:dur="250">
         <p14:reveal/>
       </p:transition>
     </mc:Choice>
-    <mc:Fallback>
+    <mc:Fallback xmlns="">
       <p:transition>
         <p:fade/>
       </p:transition>
@@ -9036,13 +9037,13 @@
   <p:clrMapOvr>
     <a:masterClrMapping/>
   </p:clrMapOvr>
-  <mc:AlternateContent xmlns:mc="http://schemas.openxmlformats.org/markup-compatibility/2006">
-    <mc:Choice xmlns:p14="http://schemas.microsoft.com/office/powerpoint/2010/main" Requires="p14">
+  <mc:AlternateContent xmlns:mc="http://schemas.openxmlformats.org/markup-compatibility/2006" xmlns:p14="http://schemas.microsoft.com/office/powerpoint/2010/main">
+    <mc:Choice Requires="p14">
       <p:transition p14:dur="250">
         <p14:reveal/>
       </p:transition>
     </mc:Choice>
-    <mc:Fallback>
+    <mc:Fallback xmlns="">
       <p:transition>
         <p:fade/>
       </p:transition>
@@ -9359,13 +9360,13 @@
   <p:clrMapOvr>
     <a:masterClrMapping/>
   </p:clrMapOvr>
-  <mc:AlternateContent xmlns:mc="http://schemas.openxmlformats.org/markup-compatibility/2006">
-    <mc:Choice xmlns:p14="http://schemas.microsoft.com/office/powerpoint/2010/main" Requires="p14">
+  <mc:AlternateContent xmlns:mc="http://schemas.openxmlformats.org/markup-compatibility/2006" xmlns:p14="http://schemas.microsoft.com/office/powerpoint/2010/main">
+    <mc:Choice Requires="p14">
       <p:transition p14:dur="250">
         <p14:reveal/>
       </p:transition>
     </mc:Choice>
-    <mc:Fallback>
+    <mc:Fallback xmlns="">
       <p:transition>
         <p:fade/>
       </p:transition>
@@ -9541,13 +9542,13 @@
   <p:clrMapOvr>
     <a:masterClrMapping/>
   </p:clrMapOvr>
-  <mc:AlternateContent xmlns:mc="http://schemas.openxmlformats.org/markup-compatibility/2006">
-    <mc:Choice xmlns:p14="http://schemas.microsoft.com/office/powerpoint/2010/main" Requires="p14">
+  <mc:AlternateContent xmlns:mc="http://schemas.openxmlformats.org/markup-compatibility/2006" xmlns:p14="http://schemas.microsoft.com/office/powerpoint/2010/main">
+    <mc:Choice Requires="p14">
       <p:transition p14:dur="250">
         <p14:reveal/>
       </p:transition>
     </mc:Choice>
-    <mc:Fallback>
+    <mc:Fallback xmlns="">
       <p:transition>
         <p:fade/>
       </p:transition>
@@ -9733,13 +9734,13 @@
   <p:clrMapOvr>
     <a:masterClrMapping/>
   </p:clrMapOvr>
-  <mc:AlternateContent xmlns:mc="http://schemas.openxmlformats.org/markup-compatibility/2006">
-    <mc:Choice xmlns:p14="http://schemas.microsoft.com/office/powerpoint/2010/main" Requires="p14">
+  <mc:AlternateContent xmlns:mc="http://schemas.openxmlformats.org/markup-compatibility/2006" xmlns:p14="http://schemas.microsoft.com/office/powerpoint/2010/main">
+    <mc:Choice Requires="p14">
       <p:transition p14:dur="250">
         <p14:reveal/>
       </p:transition>
     </mc:Choice>
-    <mc:Fallback>
+    <mc:Fallback xmlns="">
       <p:transition>
         <p:fade/>
       </p:transition>
@@ -9915,13 +9916,13 @@
   <p:clrMapOvr>
     <a:masterClrMapping/>
   </p:clrMapOvr>
-  <mc:AlternateContent xmlns:mc="http://schemas.openxmlformats.org/markup-compatibility/2006">
-    <mc:Choice xmlns:p14="http://schemas.microsoft.com/office/powerpoint/2010/main" Requires="p14">
+  <mc:AlternateContent xmlns:mc="http://schemas.openxmlformats.org/markup-compatibility/2006" xmlns:p14="http://schemas.microsoft.com/office/powerpoint/2010/main">
+    <mc:Choice Requires="p14">
       <p:transition p14:dur="250">
         <p14:reveal/>
       </p:transition>
     </mc:Choice>
-    <mc:Fallback>
+    <mc:Fallback xmlns="">
       <p:transition>
         <p:fade/>
       </p:transition>
@@ -10174,13 +10175,13 @@
   <p:clrMapOvr>
     <a:masterClrMapping/>
   </p:clrMapOvr>
-  <mc:AlternateContent xmlns:mc="http://schemas.openxmlformats.org/markup-compatibility/2006">
-    <mc:Choice xmlns:p14="http://schemas.microsoft.com/office/powerpoint/2010/main" Requires="p14">
+  <mc:AlternateContent xmlns:mc="http://schemas.openxmlformats.org/markup-compatibility/2006" xmlns:p14="http://schemas.microsoft.com/office/powerpoint/2010/main">
+    <mc:Choice Requires="p14">
       <p:transition p14:dur="250">
         <p14:reveal/>
       </p:transition>
     </mc:Choice>
-    <mc:Fallback>
+    <mc:Fallback xmlns="">
       <p:transition>
         <p:fade/>
       </p:transition>
@@ -10418,13 +10419,13 @@
   <p:clrMapOvr>
     <a:masterClrMapping/>
   </p:clrMapOvr>
-  <mc:AlternateContent xmlns:mc="http://schemas.openxmlformats.org/markup-compatibility/2006">
-    <mc:Choice xmlns:p14="http://schemas.microsoft.com/office/powerpoint/2010/main" Requires="p14">
+  <mc:AlternateContent xmlns:mc="http://schemas.openxmlformats.org/markup-compatibility/2006" xmlns:p14="http://schemas.microsoft.com/office/powerpoint/2010/main">
+    <mc:Choice Requires="p14">
       <p:transition p14:dur="250">
         <p14:reveal/>
       </p:transition>
     </mc:Choice>
-    <mc:Fallback>
+    <mc:Fallback xmlns="">
       <p:transition>
         <p:fade/>
       </p:transition>
@@ -10804,13 +10805,13 @@
   <p:clrMapOvr>
     <a:masterClrMapping/>
   </p:clrMapOvr>
-  <mc:AlternateContent xmlns:mc="http://schemas.openxmlformats.org/markup-compatibility/2006">
-    <mc:Choice xmlns:p14="http://schemas.microsoft.com/office/powerpoint/2010/main" Requires="p14">
+  <mc:AlternateContent xmlns:mc="http://schemas.openxmlformats.org/markup-compatibility/2006" xmlns:p14="http://schemas.microsoft.com/office/powerpoint/2010/main">
+    <mc:Choice Requires="p14">
       <p:transition p14:dur="250">
         <p14:reveal/>
       </p:transition>
     </mc:Choice>
-    <mc:Fallback>
+    <mc:Fallback xmlns="">
       <p:transition>
         <p:fade/>
       </p:transition>
@@ -10939,13 +10940,13 @@
   <p:clrMapOvr>
     <a:masterClrMapping/>
   </p:clrMapOvr>
-  <mc:AlternateContent xmlns:mc="http://schemas.openxmlformats.org/markup-compatibility/2006">
-    <mc:Choice xmlns:p14="http://schemas.microsoft.com/office/powerpoint/2010/main" Requires="p14">
+  <mc:AlternateContent xmlns:mc="http://schemas.openxmlformats.org/markup-compatibility/2006" xmlns:p14="http://schemas.microsoft.com/office/powerpoint/2010/main">
+    <mc:Choice Requires="p14">
       <p:transition p14:dur="250">
         <p14:reveal/>
       </p:transition>
     </mc:Choice>
-    <mc:Fallback>
+    <mc:Fallback xmlns="">
       <p:transition>
         <p:fade/>
       </p:transition>
@@ -11046,13 +11047,13 @@
   <p:clrMapOvr>
     <a:masterClrMapping/>
   </p:clrMapOvr>
-  <mc:AlternateContent xmlns:mc="http://schemas.openxmlformats.org/markup-compatibility/2006">
-    <mc:Choice xmlns:p14="http://schemas.microsoft.com/office/powerpoint/2010/main" Requires="p14">
+  <mc:AlternateContent xmlns:mc="http://schemas.openxmlformats.org/markup-compatibility/2006" xmlns:p14="http://schemas.microsoft.com/office/powerpoint/2010/main">
+    <mc:Choice Requires="p14">
       <p:transition p14:dur="250">
         <p14:reveal/>
       </p:transition>
     </mc:Choice>
-    <mc:Fallback>
+    <mc:Fallback xmlns="">
       <p:transition>
         <p:fade/>
       </p:transition>
@@ -11313,13 +11314,13 @@
   <p:clrMapOvr>
     <a:masterClrMapping/>
   </p:clrMapOvr>
-  <mc:AlternateContent xmlns:mc="http://schemas.openxmlformats.org/markup-compatibility/2006">
-    <mc:Choice xmlns:p14="http://schemas.microsoft.com/office/powerpoint/2010/main" Requires="p14">
+  <mc:AlternateContent xmlns:mc="http://schemas.openxmlformats.org/markup-compatibility/2006" xmlns:p14="http://schemas.microsoft.com/office/powerpoint/2010/main">
+    <mc:Choice Requires="p14">
       <p:transition p14:dur="250">
         <p14:reveal/>
       </p:transition>
     </mc:Choice>
-    <mc:Fallback>
+    <mc:Fallback xmlns="">
       <p:transition>
         <p:fade/>
       </p:transition>
@@ -11588,13 +11589,13 @@
   <p:clrMapOvr>
     <a:masterClrMapping/>
   </p:clrMapOvr>
-  <mc:AlternateContent xmlns:mc="http://schemas.openxmlformats.org/markup-compatibility/2006">
-    <mc:Choice xmlns:p14="http://schemas.microsoft.com/office/powerpoint/2010/main" Requires="p14">
+  <mc:AlternateContent xmlns:mc="http://schemas.openxmlformats.org/markup-compatibility/2006" xmlns:p14="http://schemas.microsoft.com/office/powerpoint/2010/main">
+    <mc:Choice Requires="p14">
       <p:transition p14:dur="250">
         <p14:reveal/>
       </p:transition>
     </mc:Choice>
-    <mc:Fallback>
+    <mc:Fallback xmlns="">
       <p:transition>
         <p:fade/>
       </p:transition>
@@ -12394,13 +12395,13 @@
     <p:sldLayoutId id="2147483692" r:id="rId15"/>
     <p:sldLayoutId id="2147483693" r:id="rId16"/>
   </p:sldLayoutIdLst>
-  <mc:AlternateContent xmlns:mc="http://schemas.openxmlformats.org/markup-compatibility/2006">
-    <mc:Choice xmlns:p14="http://schemas.microsoft.com/office/powerpoint/2010/main" Requires="p14">
+  <mc:AlternateContent xmlns:mc="http://schemas.openxmlformats.org/markup-compatibility/2006" xmlns:p14="http://schemas.microsoft.com/office/powerpoint/2010/main">
+    <mc:Choice Requires="p14">
       <p:transition p14:dur="250">
         <p14:reveal/>
       </p:transition>
     </mc:Choice>
-    <mc:Fallback>
+    <mc:Fallback xmlns="">
       <p:transition>
         <p:fade/>
       </p:transition>
@@ -13028,13 +13029,13 @@
   <p:clrMapOvr>
     <a:masterClrMapping/>
   </p:clrMapOvr>
-  <mc:AlternateContent xmlns:mc="http://schemas.openxmlformats.org/markup-compatibility/2006">
-    <mc:Choice xmlns:p14="http://schemas.microsoft.com/office/powerpoint/2010/main" Requires="p14">
+  <mc:AlternateContent xmlns:mc="http://schemas.openxmlformats.org/markup-compatibility/2006" xmlns:p14="http://schemas.microsoft.com/office/powerpoint/2010/main">
+    <mc:Choice Requires="p14">
       <p:transition p14:dur="250">
         <p14:reveal/>
       </p:transition>
     </mc:Choice>
-    <mc:Fallback>
+    <mc:Fallback xmlns="">
       <p:transition>
         <p:fade/>
       </p:transition>
@@ -13044,6 +13045,292 @@
 </file>
 
 <file path=ppt/slides/slide10.xml><?xml version="1.0" encoding="utf-8"?>
+<p:sld xmlns:a="http://schemas.openxmlformats.org/drawingml/2006/main" xmlns:r="http://schemas.openxmlformats.org/officeDocument/2006/relationships" xmlns:p="http://schemas.openxmlformats.org/presentationml/2006/main">
+  <p:cSld>
+    <p:spTree>
+      <p:nvGrpSpPr>
+        <p:cNvPr id="1" name=""/>
+        <p:cNvGrpSpPr/>
+        <p:nvPr/>
+      </p:nvGrpSpPr>
+      <p:grpSpPr>
+        <a:xfrm>
+          <a:off x="0" y="0"/>
+          <a:ext cx="0" cy="0"/>
+          <a:chOff x="0" y="0"/>
+          <a:chExt cx="0" cy="0"/>
+        </a:xfrm>
+      </p:grpSpPr>
+      <p:sp>
+        <p:nvSpPr>
+          <p:cNvPr id="2" name="Title 1">
+            <a:extLst>
+              <a:ext uri="{FF2B5EF4-FFF2-40B4-BE49-F238E27FC236}">
+                <a16:creationId xmlns:a16="http://schemas.microsoft.com/office/drawing/2014/main" id="{46C7F940-C8D5-7B00-852B-9FBA32D81001}"/>
+              </a:ext>
+            </a:extLst>
+          </p:cNvPr>
+          <p:cNvSpPr>
+            <a:spLocks noGrp="1"/>
+          </p:cNvSpPr>
+          <p:nvPr>
+            <p:ph type="title"/>
+          </p:nvPr>
+        </p:nvSpPr>
+        <p:spPr>
+          <a:xfrm>
+            <a:off x="677334" y="353961"/>
+            <a:ext cx="8596668" cy="835742"/>
+          </a:xfrm>
+        </p:spPr>
+        <p:txBody>
+          <a:bodyPr>
+            <a:normAutofit/>
+          </a:bodyPr>
+          <a:lstStyle/>
+          <a:p>
+            <a:r>
+              <a:rPr lang="en-IN" sz="4000" dirty="0">
+                <a:solidFill>
+                  <a:schemeClr val="accent2">
+                    <a:lumMod val="75000"/>
+                  </a:schemeClr>
+                </a:solidFill>
+              </a:rPr>
+              <a:t>Environmental Impact Analysis</a:t>
+            </a:r>
+          </a:p>
+        </p:txBody>
+      </p:sp>
+      <p:pic>
+        <p:nvPicPr>
+          <p:cNvPr id="7" name="Content Placeholder 6">
+            <a:extLst>
+              <a:ext uri="{FF2B5EF4-FFF2-40B4-BE49-F238E27FC236}">
+                <a16:creationId xmlns:a16="http://schemas.microsoft.com/office/drawing/2014/main" id="{66851AA3-8433-C2DB-7DD4-BB21B251B800}"/>
+              </a:ext>
+            </a:extLst>
+          </p:cNvPr>
+          <p:cNvPicPr>
+            <a:picLocks noGrp="1" noChangeAspect="1"/>
+          </p:cNvPicPr>
+          <p:nvPr>
+            <p:ph sz="half" idx="1"/>
+          </p:nvPr>
+        </p:nvPicPr>
+        <p:blipFill>
+          <a:blip r:embed="rId2"/>
+          <a:stretch>
+            <a:fillRect/>
+          </a:stretch>
+        </p:blipFill>
+        <p:spPr>
+          <a:xfrm>
+            <a:off x="550044" y="1602658"/>
+            <a:ext cx="5796632" cy="3087329"/>
+          </a:xfrm>
+          <a:prstGeom prst="rect">
+            <a:avLst/>
+          </a:prstGeom>
+          <a:solidFill>
+            <a:srgbClr val="FFFFFF">
+              <a:shade val="85000"/>
+            </a:srgbClr>
+          </a:solidFill>
+          <a:ln w="88900" cap="sq">
+            <a:solidFill>
+              <a:srgbClr val="FFFFFF"/>
+            </a:solidFill>
+            <a:miter lim="800000"/>
+          </a:ln>
+          <a:effectLst>
+            <a:outerShdw blurRad="55000" dist="18000" dir="5400000" algn="tl" rotWithShape="0">
+              <a:srgbClr val="000000">
+                <a:alpha val="40000"/>
+              </a:srgbClr>
+            </a:outerShdw>
+          </a:effectLst>
+          <a:scene3d>
+            <a:camera prst="orthographicFront"/>
+            <a:lightRig rig="twoPt" dir="t">
+              <a:rot lat="0" lon="0" rev="7200000"/>
+            </a:lightRig>
+          </a:scene3d>
+          <a:sp3d>
+            <a:bevelT w="25400" h="19050"/>
+            <a:contourClr>
+              <a:srgbClr val="FFFFFF"/>
+            </a:contourClr>
+          </a:sp3d>
+        </p:spPr>
+      </p:pic>
+      <p:pic>
+        <p:nvPicPr>
+          <p:cNvPr id="9" name="Content Placeholder 8">
+            <a:extLst>
+              <a:ext uri="{FF2B5EF4-FFF2-40B4-BE49-F238E27FC236}">
+                <a16:creationId xmlns:a16="http://schemas.microsoft.com/office/drawing/2014/main" id="{0A237DF6-278E-DA77-7200-4B6B26A72643}"/>
+              </a:ext>
+            </a:extLst>
+          </p:cNvPr>
+          <p:cNvPicPr>
+            <a:picLocks noGrp="1" noChangeAspect="1"/>
+          </p:cNvPicPr>
+          <p:nvPr>
+            <p:ph sz="half" idx="2"/>
+          </p:nvPr>
+        </p:nvPicPr>
+        <p:blipFill>
+          <a:blip r:embed="rId3"/>
+          <a:stretch>
+            <a:fillRect/>
+          </a:stretch>
+        </p:blipFill>
+        <p:spPr>
+          <a:xfrm>
+            <a:off x="6548289" y="1602658"/>
+            <a:ext cx="5093667" cy="3087327"/>
+          </a:xfrm>
+          <a:prstGeom prst="rect">
+            <a:avLst/>
+          </a:prstGeom>
+          <a:solidFill>
+            <a:srgbClr val="FFFFFF">
+              <a:shade val="85000"/>
+            </a:srgbClr>
+          </a:solidFill>
+          <a:ln w="88900" cap="sq">
+            <a:solidFill>
+              <a:srgbClr val="FFFFFF"/>
+            </a:solidFill>
+            <a:miter lim="800000"/>
+          </a:ln>
+          <a:effectLst>
+            <a:outerShdw blurRad="55000" dist="18000" dir="5400000" algn="tl" rotWithShape="0">
+              <a:srgbClr val="000000">
+                <a:alpha val="40000"/>
+              </a:srgbClr>
+            </a:outerShdw>
+          </a:effectLst>
+          <a:scene3d>
+            <a:camera prst="orthographicFront"/>
+            <a:lightRig rig="twoPt" dir="t">
+              <a:rot lat="0" lon="0" rev="7200000"/>
+            </a:lightRig>
+          </a:scene3d>
+          <a:sp3d>
+            <a:bevelT w="25400" h="19050"/>
+            <a:contourClr>
+              <a:srgbClr val="FFFFFF"/>
+            </a:contourClr>
+          </a:sp3d>
+        </p:spPr>
+      </p:pic>
+      <p:sp>
+        <p:nvSpPr>
+          <p:cNvPr id="5" name="TextBox 4">
+            <a:extLst>
+              <a:ext uri="{FF2B5EF4-FFF2-40B4-BE49-F238E27FC236}">
+                <a16:creationId xmlns:a16="http://schemas.microsoft.com/office/drawing/2014/main" id="{C0FD3AA2-DA7C-9FD4-0571-99EDF5DB56A7}"/>
+              </a:ext>
+            </a:extLst>
+          </p:cNvPr>
+          <p:cNvSpPr txBox="1"/>
+          <p:nvPr/>
+        </p:nvSpPr>
+        <p:spPr>
+          <a:xfrm>
+            <a:off x="3116826" y="4984953"/>
+            <a:ext cx="7502013" cy="1477328"/>
+          </a:xfrm>
+          <a:prstGeom prst="rect">
+            <a:avLst/>
+          </a:prstGeom>
+          <a:noFill/>
+        </p:spPr>
+        <p:txBody>
+          <a:bodyPr wrap="square" rtlCol="0">
+            <a:spAutoFit/>
+          </a:bodyPr>
+          <a:lstStyle/>
+          <a:p>
+            <a:pPr marL="285750" indent="-285750">
+              <a:buFont typeface="Arial" panose="020B0604020202020204" pitchFamily="34" charset="0"/>
+              <a:buChar char="•"/>
+            </a:pPr>
+            <a:r>
+              <a:rPr lang="en-IN" dirty="0"/>
+              <a:t>Significant variation exists in global PM2.5 levels</a:t>
+            </a:r>
+          </a:p>
+          <a:p>
+            <a:pPr marL="285750" indent="-285750">
+              <a:buFont typeface="Arial" panose="020B0604020202020204" pitchFamily="34" charset="0"/>
+              <a:buChar char="•"/>
+            </a:pPr>
+            <a:r>
+              <a:rPr lang="en-IN" dirty="0"/>
+              <a:t>Several regions exhibit elevated pollution concentrations</a:t>
+            </a:r>
+          </a:p>
+          <a:p>
+            <a:pPr marL="285750" indent="-285750">
+              <a:buFont typeface="Arial" panose="020B0604020202020204" pitchFamily="34" charset="0"/>
+              <a:buChar char="•"/>
+            </a:pPr>
+            <a:r>
+              <a:rPr lang="en-IN" dirty="0"/>
+              <a:t>Pollution indicators correlate with weather conditions</a:t>
+            </a:r>
+          </a:p>
+          <a:p>
+            <a:pPr marL="285750" indent="-285750">
+              <a:buFont typeface="Arial" panose="020B0604020202020204" pitchFamily="34" charset="0"/>
+              <a:buChar char="•"/>
+            </a:pPr>
+            <a:r>
+              <a:rPr lang="en-IN" dirty="0"/>
+              <a:t>Air quality analysis provides environmental insights</a:t>
+            </a:r>
+          </a:p>
+          <a:p>
+            <a:pPr marL="285750" indent="-285750">
+              <a:buFont typeface="Arial" panose="020B0604020202020204" pitchFamily="34" charset="0"/>
+              <a:buChar char="•"/>
+            </a:pPr>
+            <a:r>
+              <a:rPr lang="en-IN" dirty="0"/>
+              <a:t>Environmental variables contribute to forecasting behaviour</a:t>
+            </a:r>
+          </a:p>
+        </p:txBody>
+      </p:sp>
+    </p:spTree>
+    <p:extLst>
+      <p:ext uri="{BB962C8B-B14F-4D97-AF65-F5344CB8AC3E}">
+        <p14:creationId xmlns:p14="http://schemas.microsoft.com/office/powerpoint/2010/main" val="2464159384"/>
+      </p:ext>
+    </p:extLst>
+  </p:cSld>
+  <p:clrMapOvr>
+    <a:masterClrMapping/>
+  </p:clrMapOvr>
+  <mc:AlternateContent xmlns:mc="http://schemas.openxmlformats.org/markup-compatibility/2006" xmlns:p14="http://schemas.microsoft.com/office/powerpoint/2010/main">
+    <mc:Choice Requires="p14">
+      <p:transition p14:dur="250">
+        <p14:reveal/>
+      </p:transition>
+    </mc:Choice>
+    <mc:Fallback xmlns="">
+      <p:transition>
+        <p:fade/>
+      </p:transition>
+    </mc:Fallback>
+  </mc:AlternateContent>
+</p:sld>
+</file>
+
+<file path=ppt/slides/slide11.xml><?xml version="1.0" encoding="utf-8"?>
 <p:sld xmlns:a="http://schemas.openxmlformats.org/drawingml/2006/main" xmlns:r="http://schemas.openxmlformats.org/officeDocument/2006/relationships" xmlns:p="http://schemas.openxmlformats.org/presentationml/2006/main">
   <p:cSld>
     <p:spTree>
@@ -13263,13 +13550,13 @@
   <p:clrMapOvr>
     <a:masterClrMapping/>
   </p:clrMapOvr>
-  <mc:AlternateContent xmlns:mc="http://schemas.openxmlformats.org/markup-compatibility/2006">
-    <mc:Choice xmlns:p14="http://schemas.microsoft.com/office/powerpoint/2010/main" Requires="p14">
+  <mc:AlternateContent xmlns:mc="http://schemas.openxmlformats.org/markup-compatibility/2006" xmlns:p14="http://schemas.microsoft.com/office/powerpoint/2010/main">
+    <mc:Choice Requires="p14">
       <p:transition p14:dur="250">
         <p14:reveal/>
       </p:transition>
     </mc:Choice>
-    <mc:Fallback>
+    <mc:Fallback xmlns="">
       <p:transition>
         <p:fade/>
       </p:transition>
@@ -13278,7 +13565,7 @@
 </p:sld>
 </file>
 
-<file path=ppt/slides/slide11.xml><?xml version="1.0" encoding="utf-8"?>
+<file path=ppt/slides/slide12.xml><?xml version="1.0" encoding="utf-8"?>
 <p:sld xmlns:a="http://schemas.openxmlformats.org/drawingml/2006/main" xmlns:r="http://schemas.openxmlformats.org/officeDocument/2006/relationships" xmlns:p="http://schemas.openxmlformats.org/presentationml/2006/main">
   <p:cSld>
     <p:spTree>
@@ -13503,13 +13790,13 @@
   <p:clrMapOvr>
     <a:masterClrMapping/>
   </p:clrMapOvr>
-  <mc:AlternateContent xmlns:mc="http://schemas.openxmlformats.org/markup-compatibility/2006">
-    <mc:Choice xmlns:p14="http://schemas.microsoft.com/office/powerpoint/2010/main" Requires="p14">
+  <mc:AlternateContent xmlns:mc="http://schemas.openxmlformats.org/markup-compatibility/2006" xmlns:p14="http://schemas.microsoft.com/office/powerpoint/2010/main">
+    <mc:Choice Requires="p14">
       <p:transition p14:dur="250">
         <p14:reveal/>
       </p:transition>
     </mc:Choice>
-    <mc:Fallback>
+    <mc:Fallback xmlns="">
       <p:transition>
         <p:fade/>
       </p:transition>
@@ -13518,7 +13805,7 @@
 </p:sld>
 </file>
 
-<file path=ppt/slides/slide12.xml><?xml version="1.0" encoding="utf-8"?>
+<file path=ppt/slides/slide13.xml><?xml version="1.0" encoding="utf-8"?>
 <p:sld xmlns:a="http://schemas.openxmlformats.org/drawingml/2006/main" xmlns:r="http://schemas.openxmlformats.org/officeDocument/2006/relationships" xmlns:p="http://schemas.openxmlformats.org/presentationml/2006/main">
   <p:cSld>
     <p:spTree>
@@ -13708,13 +13995,13 @@
   <p:clrMapOvr>
     <a:masterClrMapping/>
   </p:clrMapOvr>
-  <mc:AlternateContent xmlns:mc="http://schemas.openxmlformats.org/markup-compatibility/2006">
-    <mc:Choice xmlns:p14="http://schemas.microsoft.com/office/powerpoint/2010/main" Requires="p14">
+  <mc:AlternateContent xmlns:mc="http://schemas.openxmlformats.org/markup-compatibility/2006" xmlns:p14="http://schemas.microsoft.com/office/powerpoint/2010/main">
+    <mc:Choice Requires="p14">
       <p:transition p14:dur="250">
         <p14:reveal/>
       </p:transition>
     </mc:Choice>
-    <mc:Fallback>
+    <mc:Fallback xmlns="">
       <p:transition>
         <p:fade/>
       </p:transition>
@@ -13723,7 +14010,7 @@
 </p:sld>
 </file>
 
-<file path=ppt/slides/slide13.xml><?xml version="1.0" encoding="utf-8"?>
+<file path=ppt/slides/slide14.xml><?xml version="1.0" encoding="utf-8"?>
 <p:sld xmlns:a="http://schemas.openxmlformats.org/drawingml/2006/main" xmlns:r="http://schemas.openxmlformats.org/officeDocument/2006/relationships" xmlns:p="http://schemas.openxmlformats.org/presentationml/2006/main">
   <p:cSld>
     <p:spTree>
@@ -13918,13 +14205,13 @@
   <p:clrMapOvr>
     <a:masterClrMapping/>
   </p:clrMapOvr>
-  <mc:AlternateContent xmlns:mc="http://schemas.openxmlformats.org/markup-compatibility/2006">
-    <mc:Choice xmlns:p14="http://schemas.microsoft.com/office/powerpoint/2010/main" Requires="p14">
+  <mc:AlternateContent xmlns:mc="http://schemas.openxmlformats.org/markup-compatibility/2006" xmlns:p14="http://schemas.microsoft.com/office/powerpoint/2010/main">
+    <mc:Choice Requires="p14">
       <p:transition p14:dur="250">
         <p14:reveal/>
       </p:transition>
     </mc:Choice>
-    <mc:Fallback>
+    <mc:Fallback xmlns="">
       <p:transition>
         <p:fade/>
       </p:transition>
@@ -13933,7 +14220,7 @@
 </p:sld>
 </file>
 
-<file path=ppt/slides/slide14.xml><?xml version="1.0" encoding="utf-8"?>
+<file path=ppt/slides/slide15.xml><?xml version="1.0" encoding="utf-8"?>
 <p:sld xmlns:a="http://schemas.openxmlformats.org/drawingml/2006/main" xmlns:r="http://schemas.openxmlformats.org/officeDocument/2006/relationships" xmlns:p="http://schemas.openxmlformats.org/presentationml/2006/main">
   <p:cSld>
     <p:spTree>
@@ -14348,13 +14635,13 @@
   <p:clrMapOvr>
     <a:masterClrMapping/>
   </p:clrMapOvr>
-  <mc:AlternateContent xmlns:mc="http://schemas.openxmlformats.org/markup-compatibility/2006">
-    <mc:Choice xmlns:p14="http://schemas.microsoft.com/office/powerpoint/2010/main" Requires="p14">
+  <mc:AlternateContent xmlns:mc="http://schemas.openxmlformats.org/markup-compatibility/2006" xmlns:p14="http://schemas.microsoft.com/office/powerpoint/2010/main">
+    <mc:Choice Requires="p14">
       <p:transition p14:dur="250">
         <p14:reveal/>
       </p:transition>
     </mc:Choice>
-    <mc:Fallback>
+    <mc:Fallback xmlns="">
       <p:transition>
         <p:fade/>
       </p:transition>
@@ -14363,7 +14650,7 @@
 </p:sld>
 </file>
 
-<file path=ppt/slides/slide15.xml><?xml version="1.0" encoding="utf-8"?>
+<file path=ppt/slides/slide16.xml><?xml version="1.0" encoding="utf-8"?>
 <p:sld xmlns:a="http://schemas.openxmlformats.org/drawingml/2006/main" xmlns:r="http://schemas.openxmlformats.org/officeDocument/2006/relationships" xmlns:p="http://schemas.openxmlformats.org/presentationml/2006/main">
   <p:cSld>
     <p:spTree>
@@ -15044,13 +15331,13 @@
   <p:clrMapOvr>
     <a:masterClrMapping/>
   </p:clrMapOvr>
-  <mc:AlternateContent xmlns:mc="http://schemas.openxmlformats.org/markup-compatibility/2006">
-    <mc:Choice xmlns:p14="http://schemas.microsoft.com/office/powerpoint/2010/main" Requires="p14">
+  <mc:AlternateContent xmlns:mc="http://schemas.openxmlformats.org/markup-compatibility/2006" xmlns:p14="http://schemas.microsoft.com/office/powerpoint/2010/main">
+    <mc:Choice Requires="p14">
       <p:transition p14:dur="250">
         <p14:reveal/>
       </p:transition>
     </mc:Choice>
-    <mc:Fallback>
+    <mc:Fallback xmlns="">
       <p:transition>
         <p:fade/>
       </p:transition>
@@ -15059,7 +15346,7 @@
 </p:sld>
 </file>
 
-<file path=ppt/slides/slide16.xml><?xml version="1.0" encoding="utf-8"?>
+<file path=ppt/slides/slide17.xml><?xml version="1.0" encoding="utf-8"?>
 <p:sld xmlns:a="http://schemas.openxmlformats.org/drawingml/2006/main" xmlns:r="http://schemas.openxmlformats.org/officeDocument/2006/relationships" xmlns:p="http://schemas.openxmlformats.org/presentationml/2006/main">
   <p:cSld>
     <p:spTree>
@@ -15243,13 +15530,13 @@
   <p:clrMapOvr>
     <a:masterClrMapping/>
   </p:clrMapOvr>
-  <mc:AlternateContent xmlns:mc="http://schemas.openxmlformats.org/markup-compatibility/2006">
-    <mc:Choice xmlns:p14="http://schemas.microsoft.com/office/powerpoint/2010/main" Requires="p14">
+  <mc:AlternateContent xmlns:mc="http://schemas.openxmlformats.org/markup-compatibility/2006" xmlns:p14="http://schemas.microsoft.com/office/powerpoint/2010/main">
+    <mc:Choice Requires="p14">
       <p:transition p14:dur="250">
         <p14:reveal/>
       </p:transition>
     </mc:Choice>
-    <mc:Fallback>
+    <mc:Fallback xmlns="">
       <p:transition>
         <p:fade/>
       </p:transition>
@@ -15258,7 +15545,7 @@
 </p:sld>
 </file>
 
-<file path=ppt/slides/slide17.xml><?xml version="1.0" encoding="utf-8"?>
+<file path=ppt/slides/slide18.xml><?xml version="1.0" encoding="utf-8"?>
 <p:sld xmlns:a="http://schemas.openxmlformats.org/drawingml/2006/main" xmlns:r="http://schemas.openxmlformats.org/officeDocument/2006/relationships" xmlns:p="http://schemas.openxmlformats.org/presentationml/2006/main">
   <p:cSld>
     <p:spTree>
@@ -15457,13 +15744,13 @@
   <p:clrMapOvr>
     <a:masterClrMapping/>
   </p:clrMapOvr>
-  <mc:AlternateContent xmlns:mc="http://schemas.openxmlformats.org/markup-compatibility/2006">
-    <mc:Choice xmlns:p14="http://schemas.microsoft.com/office/powerpoint/2010/main" Requires="p14">
+  <mc:AlternateContent xmlns:mc="http://schemas.openxmlformats.org/markup-compatibility/2006" xmlns:p14="http://schemas.microsoft.com/office/powerpoint/2010/main">
+    <mc:Choice Requires="p14">
       <p:transition p14:dur="250">
         <p14:reveal/>
       </p:transition>
     </mc:Choice>
-    <mc:Fallback>
+    <mc:Fallback xmlns="">
       <p:transition>
         <p:fade/>
       </p:transition>
@@ -15472,7 +15759,7 @@
 </p:sld>
 </file>
 
-<file path=ppt/slides/slide18.xml><?xml version="1.0" encoding="utf-8"?>
+<file path=ppt/slides/slide19.xml><?xml version="1.0" encoding="utf-8"?>
 <p:sld xmlns:a="http://schemas.openxmlformats.org/drawingml/2006/main" xmlns:r="http://schemas.openxmlformats.org/officeDocument/2006/relationships" xmlns:p="http://schemas.openxmlformats.org/presentationml/2006/main">
   <p:cSld>
     <p:spTree>
@@ -15629,13 +15916,13 @@
   <p:clrMapOvr>
     <a:masterClrMapping/>
   </p:clrMapOvr>
-  <mc:AlternateContent xmlns:mc="http://schemas.openxmlformats.org/markup-compatibility/2006">
-    <mc:Choice xmlns:p14="http://schemas.microsoft.com/office/powerpoint/2010/main" Requires="p14">
+  <mc:AlternateContent xmlns:mc="http://schemas.openxmlformats.org/markup-compatibility/2006" xmlns:p14="http://schemas.microsoft.com/office/powerpoint/2010/main">
+    <mc:Choice Requires="p14">
       <p:transition p14:dur="250">
         <p14:reveal/>
       </p:transition>
     </mc:Choice>
-    <mc:Fallback>
+    <mc:Fallback xmlns="">
       <p:transition>
         <p:fade/>
       </p:transition>
@@ -15645,6 +15932,186 @@
 </file>
 
 <file path=ppt/slides/slide2.xml><?xml version="1.0" encoding="utf-8"?>
+<p:sld xmlns:a="http://schemas.openxmlformats.org/drawingml/2006/main" xmlns:r="http://schemas.openxmlformats.org/officeDocument/2006/relationships" xmlns:p="http://schemas.openxmlformats.org/presentationml/2006/main">
+  <p:cSld>
+    <p:spTree>
+      <p:nvGrpSpPr>
+        <p:cNvPr id="1" name=""/>
+        <p:cNvGrpSpPr/>
+        <p:nvPr/>
+      </p:nvGrpSpPr>
+      <p:grpSpPr>
+        <a:xfrm>
+          <a:off x="0" y="0"/>
+          <a:ext cx="0" cy="0"/>
+          <a:chOff x="0" y="0"/>
+          <a:chExt cx="0" cy="0"/>
+        </a:xfrm>
+      </p:grpSpPr>
+      <p:sp>
+        <p:nvSpPr>
+          <p:cNvPr id="2" name="Title 1">
+            <a:extLst>
+              <a:ext uri="{FF2B5EF4-FFF2-40B4-BE49-F238E27FC236}">
+                <a16:creationId xmlns:a16="http://schemas.microsoft.com/office/drawing/2014/main" id="{298AF2BB-F9D6-8797-60FF-5014D0C742A2}"/>
+              </a:ext>
+            </a:extLst>
+          </p:cNvPr>
+          <p:cNvSpPr>
+            <a:spLocks noGrp="1"/>
+          </p:cNvSpPr>
+          <p:nvPr>
+            <p:ph type="title"/>
+          </p:nvPr>
+        </p:nvSpPr>
+        <p:spPr>
+          <a:xfrm>
+            <a:off x="677334" y="501446"/>
+            <a:ext cx="10757582" cy="835742"/>
+          </a:xfrm>
+        </p:spPr>
+        <p:txBody>
+          <a:bodyPr>
+            <a:normAutofit/>
+          </a:bodyPr>
+          <a:lstStyle/>
+          <a:p>
+            <a:pPr algn="ctr"/>
+            <a:r>
+              <a:rPr lang="en-IN" sz="4000" b="1" dirty="0">
+                <a:solidFill>
+                  <a:schemeClr val="accent2">
+                    <a:lumMod val="75000"/>
+                  </a:schemeClr>
+                </a:solidFill>
+              </a:rPr>
+              <a:t>PM Accelerator Mission</a:t>
+            </a:r>
+          </a:p>
+        </p:txBody>
+      </p:sp>
+      <p:sp>
+        <p:nvSpPr>
+          <p:cNvPr id="4" name="Content Placeholder 3">
+            <a:extLst>
+              <a:ext uri="{FF2B5EF4-FFF2-40B4-BE49-F238E27FC236}">
+                <a16:creationId xmlns:a16="http://schemas.microsoft.com/office/drawing/2014/main" id="{B7770EF5-9392-FAED-0D3A-F4B59846BF43}"/>
+              </a:ext>
+            </a:extLst>
+          </p:cNvPr>
+          <p:cNvSpPr>
+            <a:spLocks noGrp="1"/>
+          </p:cNvSpPr>
+          <p:nvPr>
+            <p:ph sz="half" idx="1"/>
+          </p:nvPr>
+        </p:nvSpPr>
+        <p:spPr>
+          <a:xfrm>
+            <a:off x="840545" y="1779638"/>
+            <a:ext cx="6386165" cy="4237703"/>
+          </a:xfrm>
+        </p:spPr>
+        <p:txBody>
+          <a:bodyPr>
+            <a:normAutofit/>
+          </a:bodyPr>
+          <a:lstStyle/>
+          <a:p>
+            <a:r>
+              <a:rPr lang="en-US" dirty="0"/>
+              <a:t>PM Accelerator focuses on providing training, education, and career opportunities for aspiring and experienced Product Managers.</a:t>
+            </a:r>
+          </a:p>
+          <a:p>
+            <a:endParaRPr lang="en-US" dirty="0"/>
+          </a:p>
+          <a:p>
+            <a:r>
+              <a:rPr lang="en-US" dirty="0"/>
+              <a:t>Their mission is to make industry-leading tools, education, and AI-focused learning accessible to individuals from all backgrounds.</a:t>
+            </a:r>
+          </a:p>
+          <a:p>
+            <a:endParaRPr lang="en-US" dirty="0"/>
+          </a:p>
+          <a:p>
+            <a:r>
+              <a:rPr lang="en-US" dirty="0"/>
+              <a:t>By creating access to industry leaders, practical experience, and the right professional ecosystem, PM Accelerator helps prepare future technology and product leaders.</a:t>
+            </a:r>
+            <a:endParaRPr lang="en-IN" dirty="0"/>
+          </a:p>
+        </p:txBody>
+      </p:sp>
+      <p:pic>
+        <p:nvPicPr>
+          <p:cNvPr id="7" name="Content Placeholder 6">
+            <a:extLst>
+              <a:ext uri="{FF2B5EF4-FFF2-40B4-BE49-F238E27FC236}">
+                <a16:creationId xmlns:a16="http://schemas.microsoft.com/office/drawing/2014/main" id="{C843AE10-7C86-F40F-603A-9594AAE7EC93}"/>
+              </a:ext>
+            </a:extLst>
+          </p:cNvPr>
+          <p:cNvPicPr>
+            <a:picLocks noGrp="1" noChangeAspect="1"/>
+          </p:cNvPicPr>
+          <p:nvPr>
+            <p:ph sz="half" idx="2"/>
+          </p:nvPr>
+        </p:nvPicPr>
+        <p:blipFill>
+          <a:blip r:embed="rId2"/>
+          <a:stretch>
+            <a:fillRect/>
+          </a:stretch>
+        </p:blipFill>
+        <p:spPr>
+          <a:xfrm>
+            <a:off x="7562537" y="2313930"/>
+            <a:ext cx="4290363" cy="2230139"/>
+          </a:xfrm>
+          <a:prstGeom prst="rect">
+            <a:avLst/>
+          </a:prstGeom>
+          <a:ln>
+            <a:noFill/>
+          </a:ln>
+          <a:effectLst>
+            <a:outerShdw blurRad="292100" dist="139700" dir="2700000" algn="tl" rotWithShape="0">
+              <a:srgbClr val="333333">
+                <a:alpha val="65000"/>
+              </a:srgbClr>
+            </a:outerShdw>
+          </a:effectLst>
+        </p:spPr>
+      </p:pic>
+    </p:spTree>
+    <p:extLst>
+      <p:ext uri="{BB962C8B-B14F-4D97-AF65-F5344CB8AC3E}">
+        <p14:creationId xmlns:p14="http://schemas.microsoft.com/office/powerpoint/2010/main" val="2138984380"/>
+      </p:ext>
+    </p:extLst>
+  </p:cSld>
+  <p:clrMapOvr>
+    <a:masterClrMapping/>
+  </p:clrMapOvr>
+  <mc:AlternateContent xmlns:mc="http://schemas.openxmlformats.org/markup-compatibility/2006" xmlns:p14="http://schemas.microsoft.com/office/powerpoint/2010/main">
+    <mc:Choice Requires="p14">
+      <p:transition p14:dur="250">
+        <p14:reveal/>
+      </p:transition>
+    </mc:Choice>
+    <mc:Fallback xmlns="">
+      <p:transition>
+        <p:fade/>
+      </p:transition>
+    </mc:Fallback>
+  </mc:AlternateContent>
+</p:sld>
+</file>
+
+<file path=ppt/slides/slide3.xml><?xml version="1.0" encoding="utf-8"?>
 <p:sld xmlns:a="http://schemas.openxmlformats.org/drawingml/2006/main" xmlns:r="http://schemas.openxmlformats.org/officeDocument/2006/relationships" xmlns:p="http://schemas.openxmlformats.org/presentationml/2006/main">
   <p:cSld>
     <p:spTree>
@@ -15830,15 +16297,6 @@
               <a:srgbClr val="FFFFFF"/>
             </a:contourClr>
           </a:sp3d>
-          <a:extLst>
-            <a:ext uri="{909E8E84-426E-40DD-AFC4-6F175D3DCCD1}">
-              <a14:hiddenFill xmlns:a14="http://schemas.microsoft.com/office/drawing/2010/main">
-                <a:solidFill>
-                  <a:srgbClr val="FFFFFF"/>
-                </a:solidFill>
-              </a14:hiddenFill>
-            </a:ext>
-          </a:extLst>
         </p:spPr>
       </p:pic>
     </p:spTree>
@@ -15851,13 +16309,13 @@
   <p:clrMapOvr>
     <a:masterClrMapping/>
   </p:clrMapOvr>
-  <mc:AlternateContent xmlns:mc="http://schemas.openxmlformats.org/markup-compatibility/2006">
-    <mc:Choice xmlns:p14="http://schemas.microsoft.com/office/powerpoint/2010/main" Requires="p14">
+  <mc:AlternateContent xmlns:mc="http://schemas.openxmlformats.org/markup-compatibility/2006" xmlns:p14="http://schemas.microsoft.com/office/powerpoint/2010/main">
+    <mc:Choice Requires="p14">
       <p:transition p14:dur="250">
         <p14:reveal/>
       </p:transition>
     </mc:Choice>
-    <mc:Fallback>
+    <mc:Fallback xmlns="">
       <p:transition>
         <p:fade/>
       </p:transition>
@@ -15866,7 +16324,7 @@
 </p:sld>
 </file>
 
-<file path=ppt/slides/slide3.xml><?xml version="1.0" encoding="utf-8"?>
+<file path=ppt/slides/slide4.xml><?xml version="1.0" encoding="utf-8"?>
 <p:sld xmlns:a="http://schemas.openxmlformats.org/drawingml/2006/main" xmlns:r="http://schemas.openxmlformats.org/officeDocument/2006/relationships" xmlns:p="http://schemas.openxmlformats.org/presentationml/2006/main">
   <p:cSld>
     <p:spTree>
@@ -16097,13 +16555,13 @@
   <p:clrMapOvr>
     <a:masterClrMapping/>
   </p:clrMapOvr>
-  <mc:AlternateContent xmlns:mc="http://schemas.openxmlformats.org/markup-compatibility/2006">
-    <mc:Choice xmlns:p14="http://schemas.microsoft.com/office/powerpoint/2010/main" Requires="p14">
+  <mc:AlternateContent xmlns:mc="http://schemas.openxmlformats.org/markup-compatibility/2006" xmlns:p14="http://schemas.microsoft.com/office/powerpoint/2010/main">
+    <mc:Choice Requires="p14">
       <p:transition p14:dur="250">
         <p14:reveal/>
       </p:transition>
     </mc:Choice>
-    <mc:Fallback>
+    <mc:Fallback xmlns="">
       <p:transition>
         <p:fade/>
       </p:transition>
@@ -16112,7 +16570,7 @@
 </p:sld>
 </file>
 
-<file path=ppt/slides/slide4.xml><?xml version="1.0" encoding="utf-8"?>
+<file path=ppt/slides/slide5.xml><?xml version="1.0" encoding="utf-8"?>
 <p:sld xmlns:a="http://schemas.openxmlformats.org/drawingml/2006/main" xmlns:r="http://schemas.openxmlformats.org/officeDocument/2006/relationships" xmlns:p="http://schemas.openxmlformats.org/presentationml/2006/main">
   <p:cSld>
     <p:spTree>
@@ -16304,13 +16762,13 @@
   <p:clrMapOvr>
     <a:masterClrMapping/>
   </p:clrMapOvr>
-  <mc:AlternateContent xmlns:mc="http://schemas.openxmlformats.org/markup-compatibility/2006">
-    <mc:Choice xmlns:p14="http://schemas.microsoft.com/office/powerpoint/2010/main" Requires="p14">
+  <mc:AlternateContent xmlns:mc="http://schemas.openxmlformats.org/markup-compatibility/2006" xmlns:p14="http://schemas.microsoft.com/office/powerpoint/2010/main">
+    <mc:Choice Requires="p14">
       <p:transition p14:dur="250">
         <p14:reveal/>
       </p:transition>
     </mc:Choice>
-    <mc:Fallback>
+    <mc:Fallback xmlns="">
       <p:transition>
         <p:fade/>
       </p:transition>
@@ -16319,7 +16777,7 @@
 </p:sld>
 </file>
 
-<file path=ppt/slides/slide5.xml><?xml version="1.0" encoding="utf-8"?>
+<file path=ppt/slides/slide6.xml><?xml version="1.0" encoding="utf-8"?>
 <p:sld xmlns:a="http://schemas.openxmlformats.org/drawingml/2006/main" xmlns:r="http://schemas.openxmlformats.org/officeDocument/2006/relationships" xmlns:p="http://schemas.openxmlformats.org/presentationml/2006/main">
   <p:cSld>
     <p:spTree>
@@ -16531,13 +16989,13 @@
   <p:clrMapOvr>
     <a:masterClrMapping/>
   </p:clrMapOvr>
-  <mc:AlternateContent xmlns:mc="http://schemas.openxmlformats.org/markup-compatibility/2006">
-    <mc:Choice xmlns:p14="http://schemas.microsoft.com/office/powerpoint/2010/main" Requires="p14">
+  <mc:AlternateContent xmlns:mc="http://schemas.openxmlformats.org/markup-compatibility/2006" xmlns:p14="http://schemas.microsoft.com/office/powerpoint/2010/main">
+    <mc:Choice Requires="p14">
       <p:transition p14:dur="250">
         <p14:reveal/>
       </p:transition>
     </mc:Choice>
-    <mc:Fallback>
+    <mc:Fallback xmlns="">
       <p:transition>
         <p:fade/>
       </p:transition>
@@ -16546,7 +17004,7 @@
 </p:sld>
 </file>
 
-<file path=ppt/slides/slide6.xml><?xml version="1.0" encoding="utf-8"?>
+<file path=ppt/slides/slide7.xml><?xml version="1.0" encoding="utf-8"?>
 <p:sld xmlns:a="http://schemas.openxmlformats.org/drawingml/2006/main" xmlns:r="http://schemas.openxmlformats.org/officeDocument/2006/relationships" xmlns:p="http://schemas.openxmlformats.org/presentationml/2006/main">
   <p:cSld>
     <p:spTree>
@@ -16747,13 +17205,13 @@
   <p:clrMapOvr>
     <a:masterClrMapping/>
   </p:clrMapOvr>
-  <mc:AlternateContent xmlns:mc="http://schemas.openxmlformats.org/markup-compatibility/2006">
-    <mc:Choice xmlns:p14="http://schemas.microsoft.com/office/powerpoint/2010/main" Requires="p14">
+  <mc:AlternateContent xmlns:mc="http://schemas.openxmlformats.org/markup-compatibility/2006" xmlns:p14="http://schemas.microsoft.com/office/powerpoint/2010/main">
+    <mc:Choice Requires="p14">
       <p:transition p14:dur="250">
         <p14:reveal/>
       </p:transition>
     </mc:Choice>
-    <mc:Fallback>
+    <mc:Fallback xmlns="">
       <p:transition>
         <p:fade/>
       </p:transition>
@@ -16762,7 +17220,7 @@
 </p:sld>
 </file>
 
-<file path=ppt/slides/slide7.xml><?xml version="1.0" encoding="utf-8"?>
+<file path=ppt/slides/slide8.xml><?xml version="1.0" encoding="utf-8"?>
 <p:sld xmlns:a="http://schemas.openxmlformats.org/drawingml/2006/main" xmlns:r="http://schemas.openxmlformats.org/officeDocument/2006/relationships" xmlns:p="http://schemas.openxmlformats.org/presentationml/2006/main">
   <p:cSld>
     <p:spTree>
@@ -17041,13 +17499,13 @@
   <p:clrMapOvr>
     <a:masterClrMapping/>
   </p:clrMapOvr>
-  <mc:AlternateContent xmlns:mc="http://schemas.openxmlformats.org/markup-compatibility/2006">
-    <mc:Choice xmlns:p14="http://schemas.microsoft.com/office/powerpoint/2010/main" Requires="p14">
+  <mc:AlternateContent xmlns:mc="http://schemas.openxmlformats.org/markup-compatibility/2006" xmlns:p14="http://schemas.microsoft.com/office/powerpoint/2010/main">
+    <mc:Choice Requires="p14">
       <p:transition p14:dur="250">
         <p14:reveal/>
       </p:transition>
     </mc:Choice>
-    <mc:Fallback>
+    <mc:Fallback xmlns="">
       <p:transition>
         <p:fade/>
       </p:transition>
@@ -17056,7 +17514,7 @@
 </p:sld>
 </file>
 
-<file path=ppt/slides/slide8.xml><?xml version="1.0" encoding="utf-8"?>
+<file path=ppt/slides/slide9.xml><?xml version="1.0" encoding="utf-8"?>
 <p:sld xmlns:a="http://schemas.openxmlformats.org/drawingml/2006/main" xmlns:r="http://schemas.openxmlformats.org/officeDocument/2006/relationships" xmlns:p="http://schemas.openxmlformats.org/presentationml/2006/main">
   <p:cSld>
     <p:spTree>
@@ -17328,299 +17786,13 @@
   <p:clrMapOvr>
     <a:masterClrMapping/>
   </p:clrMapOvr>
-  <mc:AlternateContent xmlns:mc="http://schemas.openxmlformats.org/markup-compatibility/2006">
-    <mc:Choice xmlns:p14="http://schemas.microsoft.com/office/powerpoint/2010/main" Requires="p14">
+  <mc:AlternateContent xmlns:mc="http://schemas.openxmlformats.org/markup-compatibility/2006" xmlns:p14="http://schemas.microsoft.com/office/powerpoint/2010/main">
+    <mc:Choice Requires="p14">
       <p:transition p14:dur="250">
         <p14:reveal/>
       </p:transition>
     </mc:Choice>
-    <mc:Fallback>
-      <p:transition>
-        <p:fade/>
-      </p:transition>
-    </mc:Fallback>
-  </mc:AlternateContent>
-</p:sld>
-</file>
-
-<file path=ppt/slides/slide9.xml><?xml version="1.0" encoding="utf-8"?>
-<p:sld xmlns:a="http://schemas.openxmlformats.org/drawingml/2006/main" xmlns:r="http://schemas.openxmlformats.org/officeDocument/2006/relationships" xmlns:p="http://schemas.openxmlformats.org/presentationml/2006/main">
-  <p:cSld>
-    <p:spTree>
-      <p:nvGrpSpPr>
-        <p:cNvPr id="1" name=""/>
-        <p:cNvGrpSpPr/>
-        <p:nvPr/>
-      </p:nvGrpSpPr>
-      <p:grpSpPr>
-        <a:xfrm>
-          <a:off x="0" y="0"/>
-          <a:ext cx="0" cy="0"/>
-          <a:chOff x="0" y="0"/>
-          <a:chExt cx="0" cy="0"/>
-        </a:xfrm>
-      </p:grpSpPr>
-      <p:sp>
-        <p:nvSpPr>
-          <p:cNvPr id="2" name="Title 1">
-            <a:extLst>
-              <a:ext uri="{FF2B5EF4-FFF2-40B4-BE49-F238E27FC236}">
-                <a16:creationId xmlns:a16="http://schemas.microsoft.com/office/drawing/2014/main" id="{46C7F940-C8D5-7B00-852B-9FBA32D81001}"/>
-              </a:ext>
-            </a:extLst>
-          </p:cNvPr>
-          <p:cNvSpPr>
-            <a:spLocks noGrp="1"/>
-          </p:cNvSpPr>
-          <p:nvPr>
-            <p:ph type="title"/>
-          </p:nvPr>
-        </p:nvSpPr>
-        <p:spPr>
-          <a:xfrm>
-            <a:off x="677334" y="353961"/>
-            <a:ext cx="8596668" cy="835742"/>
-          </a:xfrm>
-        </p:spPr>
-        <p:txBody>
-          <a:bodyPr>
-            <a:normAutofit/>
-          </a:bodyPr>
-          <a:lstStyle/>
-          <a:p>
-            <a:r>
-              <a:rPr lang="en-IN" sz="4000" dirty="0">
-                <a:solidFill>
-                  <a:schemeClr val="accent2">
-                    <a:lumMod val="75000"/>
-                  </a:schemeClr>
-                </a:solidFill>
-              </a:rPr>
-              <a:t>Environmental Impact Analysis</a:t>
-            </a:r>
-          </a:p>
-        </p:txBody>
-      </p:sp>
-      <p:pic>
-        <p:nvPicPr>
-          <p:cNvPr id="7" name="Content Placeholder 6">
-            <a:extLst>
-              <a:ext uri="{FF2B5EF4-FFF2-40B4-BE49-F238E27FC236}">
-                <a16:creationId xmlns:a16="http://schemas.microsoft.com/office/drawing/2014/main" id="{66851AA3-8433-C2DB-7DD4-BB21B251B800}"/>
-              </a:ext>
-            </a:extLst>
-          </p:cNvPr>
-          <p:cNvPicPr>
-            <a:picLocks noGrp="1" noChangeAspect="1"/>
-          </p:cNvPicPr>
-          <p:nvPr>
-            <p:ph sz="half" idx="1"/>
-          </p:nvPr>
-        </p:nvPicPr>
-        <p:blipFill>
-          <a:blip r:embed="rId2"/>
-          <a:stretch>
-            <a:fillRect/>
-          </a:stretch>
-        </p:blipFill>
-        <p:spPr>
-          <a:xfrm>
-            <a:off x="550044" y="1602658"/>
-            <a:ext cx="5796632" cy="3087329"/>
-          </a:xfrm>
-          <a:prstGeom prst="rect">
-            <a:avLst/>
-          </a:prstGeom>
-          <a:solidFill>
-            <a:srgbClr val="FFFFFF">
-              <a:shade val="85000"/>
-            </a:srgbClr>
-          </a:solidFill>
-          <a:ln w="88900" cap="sq">
-            <a:solidFill>
-              <a:srgbClr val="FFFFFF"/>
-            </a:solidFill>
-            <a:miter lim="800000"/>
-          </a:ln>
-          <a:effectLst>
-            <a:outerShdw blurRad="55000" dist="18000" dir="5400000" algn="tl" rotWithShape="0">
-              <a:srgbClr val="000000">
-                <a:alpha val="40000"/>
-              </a:srgbClr>
-            </a:outerShdw>
-          </a:effectLst>
-          <a:scene3d>
-            <a:camera prst="orthographicFront"/>
-            <a:lightRig rig="twoPt" dir="t">
-              <a:rot lat="0" lon="0" rev="7200000"/>
-            </a:lightRig>
-          </a:scene3d>
-          <a:sp3d>
-            <a:bevelT w="25400" h="19050"/>
-            <a:contourClr>
-              <a:srgbClr val="FFFFFF"/>
-            </a:contourClr>
-          </a:sp3d>
-        </p:spPr>
-      </p:pic>
-      <p:pic>
-        <p:nvPicPr>
-          <p:cNvPr id="9" name="Content Placeholder 8">
-            <a:extLst>
-              <a:ext uri="{FF2B5EF4-FFF2-40B4-BE49-F238E27FC236}">
-                <a16:creationId xmlns:a16="http://schemas.microsoft.com/office/drawing/2014/main" id="{0A237DF6-278E-DA77-7200-4B6B26A72643}"/>
-              </a:ext>
-            </a:extLst>
-          </p:cNvPr>
-          <p:cNvPicPr>
-            <a:picLocks noGrp="1" noChangeAspect="1"/>
-          </p:cNvPicPr>
-          <p:nvPr>
-            <p:ph sz="half" idx="2"/>
-          </p:nvPr>
-        </p:nvPicPr>
-        <p:blipFill>
-          <a:blip r:embed="rId3"/>
-          <a:stretch>
-            <a:fillRect/>
-          </a:stretch>
-        </p:blipFill>
-        <p:spPr>
-          <a:xfrm>
-            <a:off x="6548289" y="1602658"/>
-            <a:ext cx="5093667" cy="3087327"/>
-          </a:xfrm>
-          <a:prstGeom prst="rect">
-            <a:avLst/>
-          </a:prstGeom>
-          <a:solidFill>
-            <a:srgbClr val="FFFFFF">
-              <a:shade val="85000"/>
-            </a:srgbClr>
-          </a:solidFill>
-          <a:ln w="88900" cap="sq">
-            <a:solidFill>
-              <a:srgbClr val="FFFFFF"/>
-            </a:solidFill>
-            <a:miter lim="800000"/>
-          </a:ln>
-          <a:effectLst>
-            <a:outerShdw blurRad="55000" dist="18000" dir="5400000" algn="tl" rotWithShape="0">
-              <a:srgbClr val="000000">
-                <a:alpha val="40000"/>
-              </a:srgbClr>
-            </a:outerShdw>
-          </a:effectLst>
-          <a:scene3d>
-            <a:camera prst="orthographicFront"/>
-            <a:lightRig rig="twoPt" dir="t">
-              <a:rot lat="0" lon="0" rev="7200000"/>
-            </a:lightRig>
-          </a:scene3d>
-          <a:sp3d>
-            <a:bevelT w="25400" h="19050"/>
-            <a:contourClr>
-              <a:srgbClr val="FFFFFF"/>
-            </a:contourClr>
-          </a:sp3d>
-        </p:spPr>
-      </p:pic>
-      <p:sp>
-        <p:nvSpPr>
-          <p:cNvPr id="5" name="TextBox 4">
-            <a:extLst>
-              <a:ext uri="{FF2B5EF4-FFF2-40B4-BE49-F238E27FC236}">
-                <a16:creationId xmlns:a16="http://schemas.microsoft.com/office/drawing/2014/main" id="{C0FD3AA2-DA7C-9FD4-0571-99EDF5DB56A7}"/>
-              </a:ext>
-            </a:extLst>
-          </p:cNvPr>
-          <p:cNvSpPr txBox="1"/>
-          <p:nvPr/>
-        </p:nvSpPr>
-        <p:spPr>
-          <a:xfrm>
-            <a:off x="3116826" y="4984953"/>
-            <a:ext cx="7502013" cy="1477328"/>
-          </a:xfrm>
-          <a:prstGeom prst="rect">
-            <a:avLst/>
-          </a:prstGeom>
-          <a:noFill/>
-        </p:spPr>
-        <p:txBody>
-          <a:bodyPr wrap="square" rtlCol="0">
-            <a:spAutoFit/>
-          </a:bodyPr>
-          <a:lstStyle/>
-          <a:p>
-            <a:pPr marL="285750" indent="-285750">
-              <a:buFont typeface="Arial" panose="020B0604020202020204" pitchFamily="34" charset="0"/>
-              <a:buChar char="•"/>
-            </a:pPr>
-            <a:r>
-              <a:rPr lang="en-IN" dirty="0"/>
-              <a:t>Significant variation exists in global PM2.5 levels</a:t>
-            </a:r>
-          </a:p>
-          <a:p>
-            <a:pPr marL="285750" indent="-285750">
-              <a:buFont typeface="Arial" panose="020B0604020202020204" pitchFamily="34" charset="0"/>
-              <a:buChar char="•"/>
-            </a:pPr>
-            <a:r>
-              <a:rPr lang="en-IN" dirty="0"/>
-              <a:t>Several regions exhibit elevated pollution concentrations</a:t>
-            </a:r>
-          </a:p>
-          <a:p>
-            <a:pPr marL="285750" indent="-285750">
-              <a:buFont typeface="Arial" panose="020B0604020202020204" pitchFamily="34" charset="0"/>
-              <a:buChar char="•"/>
-            </a:pPr>
-            <a:r>
-              <a:rPr lang="en-IN" dirty="0"/>
-              <a:t>Pollution indicators correlate with weather conditions</a:t>
-            </a:r>
-          </a:p>
-          <a:p>
-            <a:pPr marL="285750" indent="-285750">
-              <a:buFont typeface="Arial" panose="020B0604020202020204" pitchFamily="34" charset="0"/>
-              <a:buChar char="•"/>
-            </a:pPr>
-            <a:r>
-              <a:rPr lang="en-IN" dirty="0"/>
-              <a:t>Air quality analysis provides environmental insights</a:t>
-            </a:r>
-          </a:p>
-          <a:p>
-            <a:pPr marL="285750" indent="-285750">
-              <a:buFont typeface="Arial" panose="020B0604020202020204" pitchFamily="34" charset="0"/>
-              <a:buChar char="•"/>
-            </a:pPr>
-            <a:r>
-              <a:rPr lang="en-IN" dirty="0"/>
-              <a:t>Environmental variables contribute to forecasting behaviour</a:t>
-            </a:r>
-          </a:p>
-        </p:txBody>
-      </p:sp>
-    </p:spTree>
-    <p:extLst>
-      <p:ext uri="{BB962C8B-B14F-4D97-AF65-F5344CB8AC3E}">
-        <p14:creationId xmlns:p14="http://schemas.microsoft.com/office/powerpoint/2010/main" val="2464159384"/>
-      </p:ext>
-    </p:extLst>
-  </p:cSld>
-  <p:clrMapOvr>
-    <a:masterClrMapping/>
-  </p:clrMapOvr>
-  <mc:AlternateContent xmlns:mc="http://schemas.openxmlformats.org/markup-compatibility/2006">
-    <mc:Choice xmlns:p14="http://schemas.microsoft.com/office/powerpoint/2010/main" Requires="p14">
-      <p:transition p14:dur="250">
-        <p14:reveal/>
-      </p:transition>
-    </mc:Choice>
-    <mc:Fallback>
+    <mc:Fallback xmlns="">
       <p:transition>
         <p:fade/>
       </p:transition>
